--- a/Healthcare_Analytics_Redesign.pptx
+++ b/Healthcare_Analytics_Redesign.pptx
@@ -152,7 +152,7 @@
               </a:defRPr>
             </a:pPr>
             <a:r>
-              <a:rPr sz="1300" b="0" i="0" u="none" strike="noStrike">
+              <a:rPr lang="en-US" sz="1300" b="0" i="0" u="none" strike="noStrike">
                 <a:solidFill>
                   <a:srgbClr val="F2F6FA"/>
                 </a:solidFill>
@@ -480,7 +480,7 @@
               </a:defRPr>
             </a:pPr>
             <a:r>
-              <a:rPr sz="1300" b="0" i="0" u="none" strike="noStrike">
+              <a:rPr lang="en-US" sz="1300" b="0" i="0" u="none" strike="noStrike">
                 <a:solidFill>
                   <a:srgbClr val="F2F6FA"/>
                 </a:solidFill>
@@ -868,7 +868,7 @@
               </a:defRPr>
             </a:pPr>
             <a:r>
-              <a:rPr sz="1200" b="0" i="0" u="none" strike="noStrike">
+              <a:rPr lang="en-IN" sz="1200" b="0" i="0" u="none" strike="noStrike">
                 <a:solidFill>
                   <a:srgbClr val="F2F6FA"/>
                 </a:solidFill>
@@ -1138,7 +1138,7 @@
               </a:defRPr>
             </a:pPr>
             <a:r>
-              <a:rPr sz="1200" b="0" i="0" u="none" strike="noStrike">
+              <a:rPr lang="en-US" sz="1200" b="0" i="0" u="none" strike="noStrike">
                 <a:solidFill>
                   <a:srgbClr val="F2F6FA"/>
                 </a:solidFill>
@@ -1408,7 +1408,7 @@
               </a:defRPr>
             </a:pPr>
             <a:r>
-              <a:rPr sz="1300" b="0" i="0" u="none" strike="noStrike">
+              <a:rPr lang="en-IN" sz="1300" b="0" i="0" u="none" strike="noStrike">
                 <a:solidFill>
                   <a:srgbClr val="F2F6FA"/>
                 </a:solidFill>
@@ -1819,7 +1819,7 @@
               </a:defRPr>
             </a:pPr>
             <a:r>
-              <a:rPr sz="1300" b="0" i="0" u="none" strike="noStrike">
+              <a:rPr lang="en-IN" sz="1300" b="0" i="0" u="none" strike="noStrike">
                 <a:solidFill>
                   <a:srgbClr val="F2F6FA"/>
                 </a:solidFill>
@@ -1864,6 +1864,12 @@
             <c:idx val="0"/>
             <c:invertIfNegative val="0"/>
             <c:bubble3D val="0"/>
+            <c:spPr>
+              <a:solidFill>
+                <a:srgbClr val="5BB8FF"/>
+              </a:solidFill>
+              <a:effectLst/>
+            </c:spPr>
             <c:extLst>
               <c:ext xmlns:c16="http://schemas.microsoft.com/office/drawing/2014/chart" uri="{C3380CC4-5D6E-409C-BE32-E72D297353CC}">
                 <c16:uniqueId val="{00000001-DB01-4EAA-9D13-5B461D012633}"/>
@@ -1874,6 +1880,12 @@
             <c:idx val="1"/>
             <c:invertIfNegative val="0"/>
             <c:bubble3D val="0"/>
+            <c:spPr>
+              <a:solidFill>
+                <a:srgbClr val="5BB8FF"/>
+              </a:solidFill>
+              <a:effectLst/>
+            </c:spPr>
             <c:extLst>
               <c:ext xmlns:c16="http://schemas.microsoft.com/office/drawing/2014/chart" uri="{C3380CC4-5D6E-409C-BE32-E72D297353CC}">
                 <c16:uniqueId val="{00000003-DB01-4EAA-9D13-5B461D012633}"/>
@@ -1884,6 +1896,12 @@
             <c:idx val="2"/>
             <c:invertIfNegative val="0"/>
             <c:bubble3D val="0"/>
+            <c:spPr>
+              <a:solidFill>
+                <a:srgbClr val="5BB8FF"/>
+              </a:solidFill>
+              <a:effectLst/>
+            </c:spPr>
             <c:extLst>
               <c:ext xmlns:c16="http://schemas.microsoft.com/office/drawing/2014/chart" uri="{C3380CC4-5D6E-409C-BE32-E72D297353CC}">
                 <c16:uniqueId val="{00000005-DB01-4EAA-9D13-5B461D012633}"/>
@@ -1894,6 +1912,12 @@
             <c:idx val="3"/>
             <c:invertIfNegative val="0"/>
             <c:bubble3D val="0"/>
+            <c:spPr>
+              <a:solidFill>
+                <a:srgbClr val="5BB8FF"/>
+              </a:solidFill>
+              <a:effectLst/>
+            </c:spPr>
             <c:extLst>
               <c:ext xmlns:c16="http://schemas.microsoft.com/office/drawing/2014/chart" uri="{C3380CC4-5D6E-409C-BE32-E72D297353CC}">
                 <c16:uniqueId val="{00000007-DB01-4EAA-9D13-5B461D012633}"/>
@@ -1904,6 +1928,12 @@
             <c:idx val="4"/>
             <c:invertIfNegative val="0"/>
             <c:bubble3D val="0"/>
+            <c:spPr>
+              <a:solidFill>
+                <a:srgbClr val="5BB8FF"/>
+              </a:solidFill>
+              <a:effectLst/>
+            </c:spPr>
             <c:extLst>
               <c:ext xmlns:c16="http://schemas.microsoft.com/office/drawing/2014/chart" uri="{C3380CC4-5D6E-409C-BE32-E72D297353CC}">
                 <c16:uniqueId val="{00000009-DB01-4EAA-9D13-5B461D012633}"/>
@@ -1914,6 +1944,12 @@
             <c:idx val="5"/>
             <c:invertIfNegative val="0"/>
             <c:bubble3D val="0"/>
+            <c:spPr>
+              <a:solidFill>
+                <a:srgbClr val="5BB8FF"/>
+              </a:solidFill>
+              <a:effectLst/>
+            </c:spPr>
             <c:extLst>
               <c:ext xmlns:c16="http://schemas.microsoft.com/office/drawing/2014/chart" uri="{C3380CC4-5D6E-409C-BE32-E72D297353CC}">
                 <c16:uniqueId val="{0000000B-DB01-4EAA-9D13-5B461D012633}"/>
@@ -4437,8 +4473,8 @@
         </p:nvSpPr>
         <p:spPr>
           <a:xfrm>
-            <a:off x="548640" y="4315968"/>
-            <a:ext cx="8046720" cy="320040"/>
+            <a:off x="448408" y="4343398"/>
+            <a:ext cx="8146951" cy="496764"/>
           </a:xfrm>
           <a:prstGeom prst="rect">
             <a:avLst/>
@@ -4450,9 +4486,6 @@
           <a:bodyPr wrap="square" lIns="0" tIns="0" rIns="0" bIns="0" rtlCol="0" anchor="t"/>
           <a:lstStyle/>
           <a:p>
-            <a:pPr marL="0" indent="0">
-              <a:buNone/>
-            </a:pPr>
             <a:r>
               <a:rPr lang="en-US" sz="1500" b="1" dirty="0">
                 <a:solidFill>
@@ -4462,7 +4495,7 @@
                 <a:ea typeface="Calibri" pitchFamily="34" charset="-122"/>
                 <a:cs typeface="Calibri" pitchFamily="34" charset="-120"/>
               </a:rPr>
-              <a:t>Himani Tuli   ·   Akash   ·   Anshuman   ·   Aditya   ·   Maulik</a:t>
+              <a:t>· Himani   ·   Akash   ·   Anshuman   ·   Aditya   ·   Maulik</a:t>
             </a:r>
             <a:endParaRPr lang="en-US" sz="1500" dirty="0"/>
           </a:p>
@@ -9506,7 +9539,7 @@
         </p:nvGraphicFramePr>
         <p:xfrm>
           <a:off x="685800" y="2194560"/>
-          <a:ext cx="4114800" cy="914400"/>
+          <a:ext cx="4114800" cy="1097280"/>
         </p:xfrm>
         <a:graphic>
           <a:graphicData uri="http://schemas.openxmlformats.org/drawingml/2006/table">
@@ -12003,8 +12036,8 @@
         </p:nvSpPr>
         <p:spPr>
           <a:xfrm>
-            <a:off x="548640" y="2286000"/>
-            <a:ext cx="8046720" cy="914400"/>
+            <a:off x="548640" y="2242038"/>
+            <a:ext cx="8046720" cy="798343"/>
           </a:xfrm>
           <a:prstGeom prst="rect">
             <a:avLst/>
@@ -12042,8 +12075,8 @@
         </p:nvSpPr>
         <p:spPr>
           <a:xfrm>
-            <a:off x="548640" y="3200400"/>
-            <a:ext cx="8046720" cy="365760"/>
+            <a:off x="329712" y="3226777"/>
+            <a:ext cx="8265648" cy="598703"/>
           </a:xfrm>
           <a:prstGeom prst="rect">
             <a:avLst/>
@@ -12094,9 +12127,7 @@
           <a:bodyPr wrap="square" lIns="0" tIns="0" rIns="0" bIns="0" rtlCol="0" anchor="t"/>
           <a:lstStyle/>
           <a:p>
-            <a:pPr marL="0" indent="0" algn="ctr">
-              <a:buNone/>
-            </a:pPr>
+            <a:pPr algn="ctr"/>
             <a:r>
               <a:rPr lang="en-US" sz="1500" b="1" dirty="0">
                 <a:solidFill>
@@ -12106,7 +12137,7 @@
                 <a:ea typeface="Calibri" pitchFamily="34" charset="-122"/>
                 <a:cs typeface="Calibri" pitchFamily="34" charset="-120"/>
               </a:rPr>
-              <a:t>Himani Tuli   ·   Akash   ·   Anshuman   ·   Aditya   ·   Maulik</a:t>
+              <a:t>· Himani  ·   Akash   ·   Anshuman   ·   Aditya   ·   Maulik</a:t>
             </a:r>
             <a:endParaRPr lang="en-US" sz="1500" dirty="0"/>
           </a:p>
@@ -12157,6 +12188,45 @@
               <a:t>19</a:t>
             </a:fld>
             <a:endParaRPr lang="en-US"/>
+          </a:p>
+        </p:txBody>
+      </p:sp>
+      <p:sp>
+        <p:nvSpPr>
+          <p:cNvPr id="7" name="TextBox 6">
+            <a:extLst>
+              <a:ext uri="{FF2B5EF4-FFF2-40B4-BE49-F238E27FC236}">
+                <a16:creationId xmlns:a16="http://schemas.microsoft.com/office/drawing/2014/main" id="{F27D60BD-BE08-0369-D83C-CF2420486B36}"/>
+              </a:ext>
+            </a:extLst>
+          </p:cNvPr>
+          <p:cNvSpPr txBox="1"/>
+          <p:nvPr/>
+        </p:nvSpPr>
+        <p:spPr>
+          <a:xfrm>
+            <a:off x="615462" y="4297680"/>
+            <a:ext cx="7350369" cy="369332"/>
+          </a:xfrm>
+          <a:prstGeom prst="rect">
+            <a:avLst/>
+          </a:prstGeom>
+          <a:noFill/>
+        </p:spPr>
+        <p:txBody>
+          <a:bodyPr wrap="square" rtlCol="0">
+            <a:spAutoFit/>
+          </a:bodyPr>
+          <a:lstStyle/>
+          <a:p>
+            <a:r>
+              <a:rPr lang="en-IN" u="sng" dirty="0">
+                <a:solidFill>
+                  <a:schemeClr val="bg1"/>
+                </a:solidFill>
+              </a:rPr>
+              <a:t>GITHUB REPOSITARY: maulikcmr05/GUVI-Project</a:t>
+            </a:r>
           </a:p>
         </p:txBody>
       </p:sp>
